--- a/presentation/xgb_ignition_v2_deck.pptx
+++ b/presentation/xgb_ignition_v2_deck.pptx
@@ -5,14 +5,14 @@
     <p:sldMasterId id="2147483648" r:id="rId1"/>
   </p:sldMasterIdLst>
   <p:sldIdLst>
-    <p:sldId id="256" r:id="rId7"/>
-    <p:sldId id="257" r:id="rId8"/>
-    <p:sldId id="258" r:id="rId9"/>
-    <p:sldId id="259" r:id="rId10"/>
-    <p:sldId id="260" r:id="rId11"/>
-    <p:sldId id="261" r:id="rId12"/>
+    <p:sldId id="256" r:id="rId2"/>
+    <p:sldId id="257" r:id="rId3"/>
+    <p:sldId id="258" r:id="rId4"/>
+    <p:sldId id="259" r:id="rId5"/>
+    <p:sldId id="260" r:id="rId6"/>
+    <p:sldId id="261" r:id="rId7"/>
   </p:sldIdLst>
-  <p:sldSz cx="12191695" cy="6858000" type="screen4x3"/>
+  <p:sldSz cx="12192000" cy="6858000"/>
   <p:notesSz cx="6858000" cy="9144000"/>
   <p:defaultTextStyle>
     <a:defPPr>
@@ -109,6 +109,22 @@
       </a:defRPr>
     </a:lvl9pPr>
   </p:defaultTextStyle>
+  <p:extLst>
+    <p:ext uri="{EFAFB233-063F-42B5-8137-9DF3F51BA10A}">
+      <p15:sldGuideLst xmlns:p15="http://schemas.microsoft.com/office/powerpoint/2012/main">
+        <p15:guide id="1" orient="horz" pos="2160">
+          <p15:clr>
+            <a:srgbClr val="A4A3A4"/>
+          </p15:clr>
+        </p15:guide>
+        <p15:guide id="2" pos="2880">
+          <p15:clr>
+            <a:srgbClr val="A4A3A4"/>
+          </p15:clr>
+        </p15:guide>
+      </p15:sldGuideLst>
+    </p:ext>
+  </p:extLst>
 </p:presentation>
 </file>
 
@@ -150,10 +166,9 @@
           <a:lstStyle/>
           <a:p>
             <a:r>
-              <a:rPr lang="en-US" smtClean="0"/>
+              <a:rPr lang="en-US"/>
               <a:t>Click to edit Master title style</a:t>
             </a:r>
-            <a:endParaRPr lang="en-US"/>
           </a:p>
         </p:txBody>
       </p:sp>
@@ -269,10 +284,9 @@
           </a:lstStyle>
           <a:p>
             <a:r>
-              <a:rPr lang="en-US" smtClean="0"/>
+              <a:rPr lang="en-US"/>
               <a:t>Click to edit Master subtitle style</a:t>
             </a:r>
-            <a:endParaRPr lang="en-US"/>
           </a:p>
         </p:txBody>
       </p:sp>
@@ -293,7 +307,7 @@
           <a:p>
             <a:fld id="{5BCAD085-E8A6-8845-BD4E-CB4CCA059FC4}" type="datetimeFigureOut">
               <a:rPr lang="en-US" smtClean="0"/>
-              <a:t>1/27/13</a:t>
+              <a:t>6/3/2026</a:t>
             </a:fld>
             <a:endParaRPr lang="en-US"/>
           </a:p>
@@ -387,10 +401,9 @@
           <a:lstStyle/>
           <a:p>
             <a:r>
-              <a:rPr lang="en-US" smtClean="0"/>
+              <a:rPr lang="en-US"/>
               <a:t>Click to edit Master title style</a:t>
             </a:r>
-            <a:endParaRPr lang="en-US"/>
           </a:p>
         </p:txBody>
       </p:sp>
@@ -411,38 +424,37 @@
           <a:p>
             <a:pPr lvl="0"/>
             <a:r>
-              <a:rPr lang="en-US" smtClean="0"/>
+              <a:rPr lang="en-US"/>
               <a:t>Click to edit Master text styles</a:t>
             </a:r>
           </a:p>
           <a:p>
             <a:pPr lvl="1"/>
             <a:r>
-              <a:rPr lang="en-US" smtClean="0"/>
+              <a:rPr lang="en-US"/>
               <a:t>Second level</a:t>
             </a:r>
           </a:p>
           <a:p>
             <a:pPr lvl="2"/>
             <a:r>
-              <a:rPr lang="en-US" smtClean="0"/>
+              <a:rPr lang="en-US"/>
               <a:t>Third level</a:t>
             </a:r>
           </a:p>
           <a:p>
             <a:pPr lvl="3"/>
             <a:r>
-              <a:rPr lang="en-US" smtClean="0"/>
+              <a:rPr lang="en-US"/>
               <a:t>Fourth level</a:t>
             </a:r>
           </a:p>
           <a:p>
             <a:pPr lvl="4"/>
             <a:r>
-              <a:rPr lang="en-US" smtClean="0"/>
+              <a:rPr lang="en-US"/>
               <a:t>Fifth level</a:t>
             </a:r>
-            <a:endParaRPr lang="en-US"/>
           </a:p>
         </p:txBody>
       </p:sp>
@@ -463,7 +475,7 @@
           <a:p>
             <a:fld id="{5BCAD085-E8A6-8845-BD4E-CB4CCA059FC4}" type="datetimeFigureOut">
               <a:rPr lang="en-US" smtClean="0"/>
-              <a:t>1/27/13</a:t>
+              <a:t>6/3/2026</a:t>
             </a:fld>
             <a:endParaRPr lang="en-US"/>
           </a:p>
@@ -562,10 +574,9 @@
           <a:lstStyle/>
           <a:p>
             <a:r>
-              <a:rPr lang="en-US" smtClean="0"/>
+              <a:rPr lang="en-US"/>
               <a:t>Click to edit Master title style</a:t>
             </a:r>
-            <a:endParaRPr lang="en-US"/>
           </a:p>
         </p:txBody>
       </p:sp>
@@ -591,38 +602,37 @@
           <a:p>
             <a:pPr lvl="0"/>
             <a:r>
-              <a:rPr lang="en-US" smtClean="0"/>
+              <a:rPr lang="en-US"/>
               <a:t>Click to edit Master text styles</a:t>
             </a:r>
           </a:p>
           <a:p>
             <a:pPr lvl="1"/>
             <a:r>
-              <a:rPr lang="en-US" smtClean="0"/>
+              <a:rPr lang="en-US"/>
               <a:t>Second level</a:t>
             </a:r>
           </a:p>
           <a:p>
             <a:pPr lvl="2"/>
             <a:r>
-              <a:rPr lang="en-US" smtClean="0"/>
+              <a:rPr lang="en-US"/>
               <a:t>Third level</a:t>
             </a:r>
           </a:p>
           <a:p>
             <a:pPr lvl="3"/>
             <a:r>
-              <a:rPr lang="en-US" smtClean="0"/>
+              <a:rPr lang="en-US"/>
               <a:t>Fourth level</a:t>
             </a:r>
           </a:p>
           <a:p>
             <a:pPr lvl="4"/>
             <a:r>
-              <a:rPr lang="en-US" smtClean="0"/>
+              <a:rPr lang="en-US"/>
               <a:t>Fifth level</a:t>
             </a:r>
-            <a:endParaRPr lang="en-US"/>
           </a:p>
         </p:txBody>
       </p:sp>
@@ -643,7 +653,7 @@
           <a:p>
             <a:fld id="{5BCAD085-E8A6-8845-BD4E-CB4CCA059FC4}" type="datetimeFigureOut">
               <a:rPr lang="en-US" smtClean="0"/>
-              <a:t>1/27/13</a:t>
+              <a:t>6/3/2026</a:t>
             </a:fld>
             <a:endParaRPr lang="en-US"/>
           </a:p>
@@ -737,10 +747,9 @@
           <a:lstStyle/>
           <a:p>
             <a:r>
-              <a:rPr lang="en-US" smtClean="0"/>
+              <a:rPr lang="en-US"/>
               <a:t>Click to edit Master title style</a:t>
             </a:r>
-            <a:endParaRPr lang="en-US"/>
           </a:p>
         </p:txBody>
       </p:sp>
@@ -761,38 +770,37 @@
           <a:p>
             <a:pPr lvl="0"/>
             <a:r>
-              <a:rPr lang="en-US" smtClean="0"/>
+              <a:rPr lang="en-US"/>
               <a:t>Click to edit Master text styles</a:t>
             </a:r>
           </a:p>
           <a:p>
             <a:pPr lvl="1"/>
             <a:r>
-              <a:rPr lang="en-US" smtClean="0"/>
+              <a:rPr lang="en-US"/>
               <a:t>Second level</a:t>
             </a:r>
           </a:p>
           <a:p>
             <a:pPr lvl="2"/>
             <a:r>
-              <a:rPr lang="en-US" smtClean="0"/>
+              <a:rPr lang="en-US"/>
               <a:t>Third level</a:t>
             </a:r>
           </a:p>
           <a:p>
             <a:pPr lvl="3"/>
             <a:r>
-              <a:rPr lang="en-US" smtClean="0"/>
+              <a:rPr lang="en-US"/>
               <a:t>Fourth level</a:t>
             </a:r>
           </a:p>
           <a:p>
             <a:pPr lvl="4"/>
             <a:r>
-              <a:rPr lang="en-US" smtClean="0"/>
+              <a:rPr lang="en-US"/>
               <a:t>Fifth level</a:t>
             </a:r>
-            <a:endParaRPr lang="en-US"/>
           </a:p>
         </p:txBody>
       </p:sp>
@@ -813,7 +821,7 @@
           <a:p>
             <a:fld id="{5BCAD085-E8A6-8845-BD4E-CB4CCA059FC4}" type="datetimeFigureOut">
               <a:rPr lang="en-US" smtClean="0"/>
-              <a:t>1/27/13</a:t>
+              <a:t>6/3/2026</a:t>
             </a:fld>
             <a:endParaRPr lang="en-US"/>
           </a:p>
@@ -916,10 +924,9 @@
           </a:lstStyle>
           <a:p>
             <a:r>
-              <a:rPr lang="en-US" smtClean="0"/>
+              <a:rPr lang="en-US"/>
               <a:t>Click to edit Master title style</a:t>
             </a:r>
-            <a:endParaRPr lang="en-US"/>
           </a:p>
         </p:txBody>
       </p:sp>
@@ -1036,7 +1043,7 @@
           <a:p>
             <a:pPr lvl="0"/>
             <a:r>
-              <a:rPr lang="en-US" smtClean="0"/>
+              <a:rPr lang="en-US"/>
               <a:t>Click to edit Master text styles</a:t>
             </a:r>
           </a:p>
@@ -1059,7 +1066,7 @@
           <a:p>
             <a:fld id="{5BCAD085-E8A6-8845-BD4E-CB4CCA059FC4}" type="datetimeFigureOut">
               <a:rPr lang="en-US" smtClean="0"/>
-              <a:t>1/27/13</a:t>
+              <a:t>6/3/2026</a:t>
             </a:fld>
             <a:endParaRPr lang="en-US"/>
           </a:p>
@@ -1153,10 +1160,9 @@
           <a:lstStyle/>
           <a:p>
             <a:r>
-              <a:rPr lang="en-US" smtClean="0"/>
+              <a:rPr lang="en-US"/>
               <a:t>Click to edit Master title style</a:t>
             </a:r>
-            <a:endParaRPr lang="en-US"/>
           </a:p>
         </p:txBody>
       </p:sp>
@@ -1210,38 +1216,37 @@
           <a:p>
             <a:pPr lvl="0"/>
             <a:r>
-              <a:rPr lang="en-US" smtClean="0"/>
+              <a:rPr lang="en-US"/>
               <a:t>Click to edit Master text styles</a:t>
             </a:r>
           </a:p>
           <a:p>
             <a:pPr lvl="1"/>
             <a:r>
-              <a:rPr lang="en-US" smtClean="0"/>
+              <a:rPr lang="en-US"/>
               <a:t>Second level</a:t>
             </a:r>
           </a:p>
           <a:p>
             <a:pPr lvl="2"/>
             <a:r>
-              <a:rPr lang="en-US" smtClean="0"/>
+              <a:rPr lang="en-US"/>
               <a:t>Third level</a:t>
             </a:r>
           </a:p>
           <a:p>
             <a:pPr lvl="3"/>
             <a:r>
-              <a:rPr lang="en-US" smtClean="0"/>
+              <a:rPr lang="en-US"/>
               <a:t>Fourth level</a:t>
             </a:r>
           </a:p>
           <a:p>
             <a:pPr lvl="4"/>
             <a:r>
-              <a:rPr lang="en-US" smtClean="0"/>
+              <a:rPr lang="en-US"/>
               <a:t>Fifth level</a:t>
             </a:r>
-            <a:endParaRPr lang="en-US"/>
           </a:p>
         </p:txBody>
       </p:sp>
@@ -1295,38 +1300,37 @@
           <a:p>
             <a:pPr lvl="0"/>
             <a:r>
-              <a:rPr lang="en-US" smtClean="0"/>
+              <a:rPr lang="en-US"/>
               <a:t>Click to edit Master text styles</a:t>
             </a:r>
           </a:p>
           <a:p>
             <a:pPr lvl="1"/>
             <a:r>
-              <a:rPr lang="en-US" smtClean="0"/>
+              <a:rPr lang="en-US"/>
               <a:t>Second level</a:t>
             </a:r>
           </a:p>
           <a:p>
             <a:pPr lvl="2"/>
             <a:r>
-              <a:rPr lang="en-US" smtClean="0"/>
+              <a:rPr lang="en-US"/>
               <a:t>Third level</a:t>
             </a:r>
           </a:p>
           <a:p>
             <a:pPr lvl="3"/>
             <a:r>
-              <a:rPr lang="en-US" smtClean="0"/>
+              <a:rPr lang="en-US"/>
               <a:t>Fourth level</a:t>
             </a:r>
           </a:p>
           <a:p>
             <a:pPr lvl="4"/>
             <a:r>
-              <a:rPr lang="en-US" smtClean="0"/>
+              <a:rPr lang="en-US"/>
               <a:t>Fifth level</a:t>
             </a:r>
-            <a:endParaRPr lang="en-US"/>
           </a:p>
         </p:txBody>
       </p:sp>
@@ -1347,7 +1351,7 @@
           <a:p>
             <a:fld id="{5BCAD085-E8A6-8845-BD4E-CB4CCA059FC4}" type="datetimeFigureOut">
               <a:rPr lang="en-US" smtClean="0"/>
-              <a:t>1/27/13</a:t>
+              <a:t>6/3/2026</a:t>
             </a:fld>
             <a:endParaRPr lang="en-US"/>
           </a:p>
@@ -1445,10 +1449,9 @@
           </a:lstStyle>
           <a:p>
             <a:r>
-              <a:rPr lang="en-US" smtClean="0"/>
+              <a:rPr lang="en-US"/>
               <a:t>Click to edit Master title style</a:t>
             </a:r>
-            <a:endParaRPr lang="en-US"/>
           </a:p>
         </p:txBody>
       </p:sp>
@@ -1511,7 +1514,7 @@
           <a:p>
             <a:pPr lvl="0"/>
             <a:r>
-              <a:rPr lang="en-US" smtClean="0"/>
+              <a:rPr lang="en-US"/>
               <a:t>Click to edit Master text styles</a:t>
             </a:r>
           </a:p>
@@ -1567,38 +1570,37 @@
           <a:p>
             <a:pPr lvl="0"/>
             <a:r>
-              <a:rPr lang="en-US" smtClean="0"/>
+              <a:rPr lang="en-US"/>
               <a:t>Click to edit Master text styles</a:t>
             </a:r>
           </a:p>
           <a:p>
             <a:pPr lvl="1"/>
             <a:r>
-              <a:rPr lang="en-US" smtClean="0"/>
+              <a:rPr lang="en-US"/>
               <a:t>Second level</a:t>
             </a:r>
           </a:p>
           <a:p>
             <a:pPr lvl="2"/>
             <a:r>
-              <a:rPr lang="en-US" smtClean="0"/>
+              <a:rPr lang="en-US"/>
               <a:t>Third level</a:t>
             </a:r>
           </a:p>
           <a:p>
             <a:pPr lvl="3"/>
             <a:r>
-              <a:rPr lang="en-US" smtClean="0"/>
+              <a:rPr lang="en-US"/>
               <a:t>Fourth level</a:t>
             </a:r>
           </a:p>
           <a:p>
             <a:pPr lvl="4"/>
             <a:r>
-              <a:rPr lang="en-US" smtClean="0"/>
+              <a:rPr lang="en-US"/>
               <a:t>Fifth level</a:t>
             </a:r>
-            <a:endParaRPr lang="en-US"/>
           </a:p>
         </p:txBody>
       </p:sp>
@@ -1661,7 +1663,7 @@
           <a:p>
             <a:pPr lvl="0"/>
             <a:r>
-              <a:rPr lang="en-US" smtClean="0"/>
+              <a:rPr lang="en-US"/>
               <a:t>Click to edit Master text styles</a:t>
             </a:r>
           </a:p>
@@ -1717,38 +1719,37 @@
           <a:p>
             <a:pPr lvl="0"/>
             <a:r>
-              <a:rPr lang="en-US" smtClean="0"/>
+              <a:rPr lang="en-US"/>
               <a:t>Click to edit Master text styles</a:t>
             </a:r>
           </a:p>
           <a:p>
             <a:pPr lvl="1"/>
             <a:r>
-              <a:rPr lang="en-US" smtClean="0"/>
+              <a:rPr lang="en-US"/>
               <a:t>Second level</a:t>
             </a:r>
           </a:p>
           <a:p>
             <a:pPr lvl="2"/>
             <a:r>
-              <a:rPr lang="en-US" smtClean="0"/>
+              <a:rPr lang="en-US"/>
               <a:t>Third level</a:t>
             </a:r>
           </a:p>
           <a:p>
             <a:pPr lvl="3"/>
             <a:r>
-              <a:rPr lang="en-US" smtClean="0"/>
+              <a:rPr lang="en-US"/>
               <a:t>Fourth level</a:t>
             </a:r>
           </a:p>
           <a:p>
             <a:pPr lvl="4"/>
             <a:r>
-              <a:rPr lang="en-US" smtClean="0"/>
+              <a:rPr lang="en-US"/>
               <a:t>Fifth level</a:t>
             </a:r>
-            <a:endParaRPr lang="en-US"/>
           </a:p>
         </p:txBody>
       </p:sp>
@@ -1769,7 +1770,7 @@
           <a:p>
             <a:fld id="{5BCAD085-E8A6-8845-BD4E-CB4CCA059FC4}" type="datetimeFigureOut">
               <a:rPr lang="en-US" smtClean="0"/>
-              <a:t>1/27/13</a:t>
+              <a:t>6/3/2026</a:t>
             </a:fld>
             <a:endParaRPr lang="en-US"/>
           </a:p>
@@ -1863,10 +1864,9 @@
           <a:lstStyle/>
           <a:p>
             <a:r>
-              <a:rPr lang="en-US" smtClean="0"/>
+              <a:rPr lang="en-US"/>
               <a:t>Click to edit Master title style</a:t>
             </a:r>
-            <a:endParaRPr lang="en-US"/>
           </a:p>
         </p:txBody>
       </p:sp>
@@ -1887,7 +1887,7 @@
           <a:p>
             <a:fld id="{5BCAD085-E8A6-8845-BD4E-CB4CCA059FC4}" type="datetimeFigureOut">
               <a:rPr lang="en-US" smtClean="0"/>
-              <a:t>1/27/13</a:t>
+              <a:t>6/3/2026</a:t>
             </a:fld>
             <a:endParaRPr lang="en-US"/>
           </a:p>
@@ -1982,7 +1982,7 @@
           <a:p>
             <a:fld id="{5BCAD085-E8A6-8845-BD4E-CB4CCA059FC4}" type="datetimeFigureOut">
               <a:rPr lang="en-US" smtClean="0"/>
-              <a:t>1/27/13</a:t>
+              <a:t>6/3/2026</a:t>
             </a:fld>
             <a:endParaRPr lang="en-US"/>
           </a:p>
@@ -2085,10 +2085,9 @@
           </a:lstStyle>
           <a:p>
             <a:r>
-              <a:rPr lang="en-US" smtClean="0"/>
+              <a:rPr lang="en-US"/>
               <a:t>Click to edit Master title style</a:t>
             </a:r>
-            <a:endParaRPr lang="en-US"/>
           </a:p>
         </p:txBody>
       </p:sp>
@@ -2142,38 +2141,37 @@
           <a:p>
             <a:pPr lvl="0"/>
             <a:r>
-              <a:rPr lang="en-US" smtClean="0"/>
+              <a:rPr lang="en-US"/>
               <a:t>Click to edit Master text styles</a:t>
             </a:r>
           </a:p>
           <a:p>
             <a:pPr lvl="1"/>
             <a:r>
-              <a:rPr lang="en-US" smtClean="0"/>
+              <a:rPr lang="en-US"/>
               <a:t>Second level</a:t>
             </a:r>
           </a:p>
           <a:p>
             <a:pPr lvl="2"/>
             <a:r>
-              <a:rPr lang="en-US" smtClean="0"/>
+              <a:rPr lang="en-US"/>
               <a:t>Third level</a:t>
             </a:r>
           </a:p>
           <a:p>
             <a:pPr lvl="3"/>
             <a:r>
-              <a:rPr lang="en-US" smtClean="0"/>
+              <a:rPr lang="en-US"/>
               <a:t>Fourth level</a:t>
             </a:r>
           </a:p>
           <a:p>
             <a:pPr lvl="4"/>
             <a:r>
-              <a:rPr lang="en-US" smtClean="0"/>
+              <a:rPr lang="en-US"/>
               <a:t>Fifth level</a:t>
             </a:r>
-            <a:endParaRPr lang="en-US"/>
           </a:p>
         </p:txBody>
       </p:sp>
@@ -2236,7 +2234,7 @@
           <a:p>
             <a:pPr lvl="0"/>
             <a:r>
-              <a:rPr lang="en-US" smtClean="0"/>
+              <a:rPr lang="en-US"/>
               <a:t>Click to edit Master text styles</a:t>
             </a:r>
           </a:p>
@@ -2259,7 +2257,7 @@
           <a:p>
             <a:fld id="{5BCAD085-E8A6-8845-BD4E-CB4CCA059FC4}" type="datetimeFigureOut">
               <a:rPr lang="en-US" smtClean="0"/>
-              <a:t>1/27/13</a:t>
+              <a:t>6/3/2026</a:t>
             </a:fld>
             <a:endParaRPr lang="en-US"/>
           </a:p>
@@ -2362,10 +2360,9 @@
           </a:lstStyle>
           <a:p>
             <a:r>
-              <a:rPr lang="en-US" smtClean="0"/>
+              <a:rPr lang="en-US"/>
               <a:t>Click to edit Master title style</a:t>
             </a:r>
-            <a:endParaRPr lang="en-US"/>
           </a:p>
         </p:txBody>
       </p:sp>
@@ -2489,7 +2486,7 @@
           <a:p>
             <a:pPr lvl="0"/>
             <a:r>
-              <a:rPr lang="en-US" smtClean="0"/>
+              <a:rPr lang="en-US"/>
               <a:t>Click to edit Master text styles</a:t>
             </a:r>
           </a:p>
@@ -2512,7 +2509,7 @@
           <a:p>
             <a:fld id="{5BCAD085-E8A6-8845-BD4E-CB4CCA059FC4}" type="datetimeFigureOut">
               <a:rPr lang="en-US" smtClean="0"/>
-              <a:t>1/27/13</a:t>
+              <a:t>6/3/2026</a:t>
             </a:fld>
             <a:endParaRPr lang="en-US"/>
           </a:p>
@@ -2621,10 +2618,9 @@
           <a:lstStyle/>
           <a:p>
             <a:r>
-              <a:rPr lang="en-US" smtClean="0"/>
+              <a:rPr lang="en-US"/>
               <a:t>Click to edit Master title style</a:t>
             </a:r>
-            <a:endParaRPr lang="en-US"/>
           </a:p>
         </p:txBody>
       </p:sp>
@@ -2655,38 +2651,37 @@
           <a:p>
             <a:pPr lvl="0"/>
             <a:r>
-              <a:rPr lang="en-US" smtClean="0"/>
+              <a:rPr lang="en-US"/>
               <a:t>Click to edit Master text styles</a:t>
             </a:r>
           </a:p>
           <a:p>
             <a:pPr lvl="1"/>
             <a:r>
-              <a:rPr lang="en-US" smtClean="0"/>
+              <a:rPr lang="en-US"/>
               <a:t>Second level</a:t>
             </a:r>
           </a:p>
           <a:p>
             <a:pPr lvl="2"/>
             <a:r>
-              <a:rPr lang="en-US" smtClean="0"/>
+              <a:rPr lang="en-US"/>
               <a:t>Third level</a:t>
             </a:r>
           </a:p>
           <a:p>
             <a:pPr lvl="3"/>
             <a:r>
-              <a:rPr lang="en-US" smtClean="0"/>
+              <a:rPr lang="en-US"/>
               <a:t>Fourth level</a:t>
             </a:r>
           </a:p>
           <a:p>
             <a:pPr lvl="4"/>
             <a:r>
-              <a:rPr lang="en-US" smtClean="0"/>
+              <a:rPr lang="en-US"/>
               <a:t>Fifth level</a:t>
             </a:r>
-            <a:endParaRPr lang="en-US"/>
           </a:p>
         </p:txBody>
       </p:sp>
@@ -2725,7 +2720,7 @@
           <a:p>
             <a:fld id="{5BCAD085-E8A6-8845-BD4E-CB4CCA059FC4}" type="datetimeFigureOut">
               <a:rPr lang="en-US" smtClean="0"/>
-              <a:t>1/27/13</a:t>
+              <a:t>6/3/2026</a:t>
             </a:fld>
             <a:endParaRPr lang="en-US"/>
           </a:p>
@@ -3084,7 +3079,7 @@
 </file>
 
 <file path=ppt/slides/slide1.xml><?xml version="1.0" encoding="utf-8"?>
-<p:sld xmlns:a="http://schemas.openxmlformats.org/drawingml/2006/main" xmlns:p="http://schemas.openxmlformats.org/presentationml/2006/main" xmlns:r="http://schemas.openxmlformats.org/officeDocument/2006/relationships">
+<p:sld xmlns:a="http://schemas.openxmlformats.org/drawingml/2006/main" xmlns:r="http://schemas.openxmlformats.org/officeDocument/2006/relationships" xmlns:p="http://schemas.openxmlformats.org/presentationml/2006/main">
   <p:cSld>
     <p:spTree>
       <p:nvGrpSpPr>
@@ -3092,7 +3087,14 @@
         <p:cNvGrpSpPr/>
         <p:nvPr/>
       </p:nvGrpSpPr>
-      <p:grpSpPr/>
+      <p:grpSpPr>
+        <a:xfrm>
+          <a:off x="0" y="0"/>
+          <a:ext cx="0" cy="0"/>
+          <a:chOff x="0" y="0"/>
+          <a:chExt cx="0" cy="0"/>
+        </a:xfrm>
+      </p:grpSpPr>
       <p:sp>
         <p:nvSpPr>
           <p:cNvPr id="2" name="Rectangle 1"/>
@@ -3134,6 +3136,7 @@
           <a:lstStyle/>
           <a:p>
             <a:pPr algn="ctr"/>
+            <a:endParaRPr/>
           </a:p>
         </p:txBody>
       </p:sp>
@@ -3178,6 +3181,7 @@
           <a:lstStyle/>
           <a:p>
             <a:pPr algn="ctr"/>
+            <a:endParaRPr/>
           </a:p>
         </p:txBody>
       </p:sp>
@@ -3198,7 +3202,7 @@
           <a:noFill/>
         </p:spPr>
         <p:txBody>
-          <a:bodyPr wrap="square" lIns="0" rIns="0" tIns="0" bIns="0" anchor="t">
+          <a:bodyPr wrap="square" lIns="0" tIns="0" rIns="0" bIns="0" anchor="t">
             <a:spAutoFit/>
           </a:bodyPr>
           <a:lstStyle/>
@@ -3233,7 +3237,7 @@
           <a:noFill/>
         </p:spPr>
         <p:txBody>
-          <a:bodyPr wrap="square" lIns="0" rIns="0" tIns="0" bIns="0" anchor="t">
+          <a:bodyPr wrap="square" lIns="0" tIns="0" rIns="0" bIns="0" anchor="t">
             <a:spAutoFit/>
           </a:bodyPr>
           <a:lstStyle/>
@@ -3292,7 +3296,7 @@
           <a:noFill/>
         </p:spPr>
         <p:txBody>
-          <a:bodyPr wrap="square" lIns="0" rIns="0" tIns="0" bIns="0" anchor="t">
+          <a:bodyPr wrap="square" lIns="0" tIns="0" rIns="0" bIns="0" anchor="t">
             <a:spAutoFit/>
           </a:bodyPr>
           <a:lstStyle/>
@@ -3327,7 +3331,7 @@
           <a:noFill/>
         </p:spPr>
         <p:txBody>
-          <a:bodyPr wrap="square" lIns="0" rIns="0" tIns="0" bIns="0" anchor="t">
+          <a:bodyPr wrap="square" lIns="0" tIns="0" rIns="0" bIns="0" anchor="t">
             <a:spAutoFit/>
           </a:bodyPr>
           <a:lstStyle/>
@@ -3654,7 +3658,7 @@
           <a:noFill/>
         </p:spPr>
         <p:txBody>
-          <a:bodyPr wrap="square" lIns="0" rIns="0" tIns="0" bIns="0" anchor="t">
+          <a:bodyPr wrap="square" lIns="0" tIns="0" rIns="0" bIns="0" anchor="t">
             <a:spAutoFit/>
           </a:bodyPr>
           <a:lstStyle/>
@@ -3689,7 +3693,7 @@
           <a:noFill/>
         </p:spPr>
         <p:txBody>
-          <a:bodyPr wrap="square" lIns="0" rIns="0" tIns="0" bIns="0" anchor="t">
+          <a:bodyPr wrap="square" lIns="0" tIns="0" rIns="0" bIns="0" anchor="t">
             <a:spAutoFit/>
           </a:bodyPr>
           <a:lstStyle/>
@@ -3716,7 +3720,7 @@
 </file>
 
 <file path=ppt/slides/slide2.xml><?xml version="1.0" encoding="utf-8"?>
-<p:sld xmlns:a="http://schemas.openxmlformats.org/drawingml/2006/main" xmlns:p="http://schemas.openxmlformats.org/presentationml/2006/main" xmlns:r="http://schemas.openxmlformats.org/officeDocument/2006/relationships">
+<p:sld xmlns:a="http://schemas.openxmlformats.org/drawingml/2006/main" xmlns:r="http://schemas.openxmlformats.org/officeDocument/2006/relationships" xmlns:p="http://schemas.openxmlformats.org/presentationml/2006/main">
   <p:cSld>
     <p:spTree>
       <p:nvGrpSpPr>
@@ -3724,7 +3728,14 @@
         <p:cNvGrpSpPr/>
         <p:nvPr/>
       </p:nvGrpSpPr>
-      <p:grpSpPr/>
+      <p:grpSpPr>
+        <a:xfrm>
+          <a:off x="0" y="0"/>
+          <a:ext cx="0" cy="0"/>
+          <a:chOff x="0" y="0"/>
+          <a:chExt cx="0" cy="0"/>
+        </a:xfrm>
+      </p:grpSpPr>
       <p:sp>
         <p:nvSpPr>
           <p:cNvPr id="2" name="Rectangle 1"/>
@@ -3766,6 +3777,7 @@
           <a:lstStyle/>
           <a:p>
             <a:pPr algn="ctr"/>
+            <a:endParaRPr/>
           </a:p>
         </p:txBody>
       </p:sp>
@@ -3810,6 +3822,7 @@
           <a:lstStyle/>
           <a:p>
             <a:pPr algn="ctr"/>
+            <a:endParaRPr/>
           </a:p>
         </p:txBody>
       </p:sp>
@@ -3830,7 +3843,7 @@
           <a:noFill/>
         </p:spPr>
         <p:txBody>
-          <a:bodyPr wrap="square" lIns="0" rIns="0" tIns="0" bIns="0" anchor="t">
+          <a:bodyPr wrap="square" lIns="0" tIns="0" rIns="0" bIns="0" anchor="t">
             <a:spAutoFit/>
           </a:bodyPr>
           <a:lstStyle/>
@@ -3865,7 +3878,7 @@
           <a:noFill/>
         </p:spPr>
         <p:txBody>
-          <a:bodyPr wrap="square" lIns="0" rIns="0" tIns="0" bIns="0" anchor="t">
+          <a:bodyPr wrap="square" lIns="0" tIns="0" rIns="0" bIns="0" anchor="t">
             <a:spAutoFit/>
           </a:bodyPr>
           <a:lstStyle/>
@@ -3899,7 +3912,7 @@
         </p:blipFill>
         <p:spPr>
           <a:xfrm>
-            <a:off x="640080" y="1005840"/>
+            <a:off x="670560" y="1005840"/>
             <a:ext cx="10881360" cy="4355890"/>
           </a:xfrm>
           <a:prstGeom prst="rect">
@@ -3924,7 +3937,7 @@
           <a:noFill/>
         </p:spPr>
         <p:txBody>
-          <a:bodyPr wrap="square" lIns="0" rIns="0" tIns="0" bIns="0" anchor="t">
+          <a:bodyPr wrap="square" lIns="0" tIns="0" rIns="0" bIns="0" anchor="t">
             <a:spAutoFit/>
           </a:bodyPr>
           <a:lstStyle/>
@@ -3959,7 +3972,7 @@
           <a:noFill/>
         </p:spPr>
         <p:txBody>
-          <a:bodyPr wrap="square" lIns="0" rIns="0" tIns="0" bIns="0" anchor="t">
+          <a:bodyPr wrap="square" lIns="0" tIns="0" rIns="0" bIns="0" anchor="t">
             <a:spAutoFit/>
           </a:bodyPr>
           <a:lstStyle/>
@@ -3970,7 +3983,7 @@
               </a:spcAft>
             </a:pPr>
             <a:r>
-              <a:rPr sz="1200">
+              <a:rPr sz="1200" dirty="0">
                 <a:solidFill>
                   <a:srgbClr val="1F1F1F"/>
                 </a:solidFill>
@@ -3986,7 +3999,7 @@
               </a:spcAft>
             </a:pPr>
             <a:r>
-              <a:rPr sz="1200">
+              <a:rPr sz="1200" dirty="0">
                 <a:solidFill>
                   <a:srgbClr val="1F1F1F"/>
                 </a:solidFill>
@@ -4002,7 +4015,7 @@
               </a:spcAft>
             </a:pPr>
             <a:r>
-              <a:rPr sz="1200">
+              <a:rPr sz="1200" dirty="0">
                 <a:solidFill>
                   <a:srgbClr val="1F1F1F"/>
                 </a:solidFill>
@@ -4018,7 +4031,7 @@
               </a:spcAft>
             </a:pPr>
             <a:r>
-              <a:rPr sz="1200">
+              <a:rPr sz="1200" dirty="0">
                 <a:solidFill>
                   <a:srgbClr val="1F1F1F"/>
                 </a:solidFill>
@@ -4034,7 +4047,7 @@
               </a:spcAft>
             </a:pPr>
             <a:r>
-              <a:rPr sz="1200">
+              <a:rPr sz="1200" dirty="0">
                 <a:solidFill>
                   <a:srgbClr val="1F1F1F"/>
                 </a:solidFill>
@@ -4050,23 +4063,41 @@
               </a:spcAft>
             </a:pPr>
             <a:r>
-              <a:rPr sz="1200">
-                <a:solidFill>
-                  <a:srgbClr val="1F1F1F"/>
-                </a:solidFill>
-                <a:latin typeface="Calibri"/>
-              </a:rPr>
-              <a:t>  we expect after down-weighting the majority class (scale_pos_weight = 0.347 deflates positive scores).</a:t>
-            </a:r>
-          </a:p>
-          <a:p>
-            <a:pPr algn="l">
-              <a:spcAft>
-                <a:spcPts val="400"/>
-              </a:spcAft>
-            </a:pPr>
-            <a:r>
-              <a:rPr sz="1200">
+              <a:rPr sz="1200" dirty="0">
+                <a:solidFill>
+                  <a:srgbClr val="1F1F1F"/>
+                </a:solidFill>
+                <a:latin typeface="Calibri"/>
+              </a:rPr>
+              <a:t>  we expect after down-weighting the majority class (</a:t>
+            </a:r>
+            <a:r>
+              <a:rPr sz="1200" dirty="0" err="1">
+                <a:solidFill>
+                  <a:srgbClr val="1F1F1F"/>
+                </a:solidFill>
+                <a:latin typeface="Calibri"/>
+              </a:rPr>
+              <a:t>scale_pos_weight</a:t>
+            </a:r>
+            <a:r>
+              <a:rPr sz="1200" dirty="0">
+                <a:solidFill>
+                  <a:srgbClr val="1F1F1F"/>
+                </a:solidFill>
+                <a:latin typeface="Calibri"/>
+              </a:rPr>
+              <a:t> = 0.347 deflates positive scores).</a:t>
+            </a:r>
+          </a:p>
+          <a:p>
+            <a:pPr algn="l">
+              <a:spcAft>
+                <a:spcPts val="400"/>
+              </a:spcAft>
+            </a:pPr>
+            <a:r>
+              <a:rPr sz="1200" dirty="0">
                 <a:solidFill>
                   <a:srgbClr val="1F1F1F"/>
                 </a:solidFill>
@@ -4094,7 +4125,7 @@
           <a:noFill/>
         </p:spPr>
         <p:txBody>
-          <a:bodyPr wrap="square" lIns="0" rIns="0" tIns="0" bIns="0" anchor="t">
+          <a:bodyPr wrap="square" lIns="0" tIns="0" rIns="0" bIns="0" anchor="t">
             <a:spAutoFit/>
           </a:bodyPr>
           <a:lstStyle/>
@@ -4129,7 +4160,7 @@
           <a:noFill/>
         </p:spPr>
         <p:txBody>
-          <a:bodyPr wrap="square" lIns="0" rIns="0" tIns="0" bIns="0" anchor="t">
+          <a:bodyPr wrap="square" lIns="0" tIns="0" rIns="0" bIns="0" anchor="t">
             <a:spAutoFit/>
           </a:bodyPr>
           <a:lstStyle/>
@@ -4156,7 +4187,7 @@
 </file>
 
 <file path=ppt/slides/slide3.xml><?xml version="1.0" encoding="utf-8"?>
-<p:sld xmlns:a="http://schemas.openxmlformats.org/drawingml/2006/main" xmlns:p="http://schemas.openxmlformats.org/presentationml/2006/main" xmlns:r="http://schemas.openxmlformats.org/officeDocument/2006/relationships">
+<p:sld xmlns:a="http://schemas.openxmlformats.org/drawingml/2006/main" xmlns:r="http://schemas.openxmlformats.org/officeDocument/2006/relationships" xmlns:p="http://schemas.openxmlformats.org/presentationml/2006/main">
   <p:cSld>
     <p:spTree>
       <p:nvGrpSpPr>
@@ -4164,7 +4195,14 @@
         <p:cNvGrpSpPr/>
         <p:nvPr/>
       </p:nvGrpSpPr>
-      <p:grpSpPr/>
+      <p:grpSpPr>
+        <a:xfrm>
+          <a:off x="0" y="0"/>
+          <a:ext cx="0" cy="0"/>
+          <a:chOff x="0" y="0"/>
+          <a:chExt cx="0" cy="0"/>
+        </a:xfrm>
+      </p:grpSpPr>
       <p:sp>
         <p:nvSpPr>
           <p:cNvPr id="2" name="Rectangle 1"/>
@@ -4206,6 +4244,7 @@
           <a:lstStyle/>
           <a:p>
             <a:pPr algn="ctr"/>
+            <a:endParaRPr/>
           </a:p>
         </p:txBody>
       </p:sp>
@@ -4250,6 +4289,7 @@
           <a:lstStyle/>
           <a:p>
             <a:pPr algn="ctr"/>
+            <a:endParaRPr/>
           </a:p>
         </p:txBody>
       </p:sp>
@@ -4270,14 +4310,14 @@
           <a:noFill/>
         </p:spPr>
         <p:txBody>
-          <a:bodyPr wrap="square" lIns="0" rIns="0" tIns="0" bIns="0" anchor="t">
+          <a:bodyPr wrap="square" lIns="0" tIns="0" rIns="0" bIns="0" anchor="t">
             <a:spAutoFit/>
           </a:bodyPr>
           <a:lstStyle/>
           <a:p>
             <a:pPr algn="l"/>
             <a:r>
-              <a:rPr sz="2400" b="1">
+              <a:rPr sz="2400" b="1" dirty="0">
                 <a:solidFill>
                   <a:srgbClr val="FFFFFF"/>
                 </a:solidFill>
@@ -4305,7 +4345,7 @@
           <a:noFill/>
         </p:spPr>
         <p:txBody>
-          <a:bodyPr wrap="square" lIns="0" rIns="0" tIns="0" bIns="0" anchor="t">
+          <a:bodyPr wrap="square" lIns="0" tIns="0" rIns="0" bIns="0" anchor="t">
             <a:spAutoFit/>
           </a:bodyPr>
           <a:lstStyle/>
@@ -4364,7 +4404,7 @@
           <a:noFill/>
         </p:spPr>
         <p:txBody>
-          <a:bodyPr wrap="square" lIns="0" rIns="0" tIns="0" bIns="0" anchor="t">
+          <a:bodyPr wrap="square" lIns="0" tIns="0" rIns="0" bIns="0" anchor="t">
             <a:spAutoFit/>
           </a:bodyPr>
           <a:lstStyle/>
@@ -4399,7 +4439,7 @@
           <a:noFill/>
         </p:spPr>
         <p:txBody>
-          <a:bodyPr wrap="square" lIns="0" rIns="0" tIns="0" bIns="0" anchor="t">
+          <a:bodyPr wrap="square" lIns="0" tIns="0" rIns="0" bIns="0" anchor="t">
             <a:spAutoFit/>
           </a:bodyPr>
           <a:lstStyle/>
@@ -4537,15 +4577,12 @@
                 <a:spcPts val="400"/>
               </a:spcAft>
             </a:pPr>
-            <a:r>
-              <a:rPr sz="1100">
-                <a:solidFill>
-                  <a:srgbClr val="1F1F1F"/>
-                </a:solidFill>
-                <a:latin typeface="Calibri"/>
-              </a:rPr>
-              <a:t/>
-            </a:r>
+            <a:endParaRPr sz="1100">
+              <a:solidFill>
+                <a:srgbClr val="1F1F1F"/>
+              </a:solidFill>
+              <a:latin typeface="Calibri"/>
+            </a:endParaRPr>
           </a:p>
           <a:p>
             <a:pPr algn="l">
@@ -4742,20 +4779,29 @@
           <a:noFill/>
         </p:spPr>
         <p:txBody>
-          <a:bodyPr wrap="square" lIns="0" rIns="0" tIns="0" bIns="0" anchor="t">
+          <a:bodyPr wrap="square" lIns="0" tIns="0" rIns="0" bIns="0" anchor="t">
             <a:spAutoFit/>
           </a:bodyPr>
           <a:lstStyle/>
           <a:p>
             <a:pPr algn="l"/>
             <a:r>
-              <a:rPr sz="900" b="0">
+              <a:rPr sz="900" b="0" dirty="0" err="1">
                 <a:solidFill>
                   <a:srgbClr val="7A7A7A"/>
                 </a:solidFill>
                 <a:latin typeface="Calibri"/>
               </a:rPr>
-              <a:t>XGBoost ignition classifier - database_xgb.csv (4 449 clean rows)</a:t>
+              <a:t>XGBoost</a:t>
+            </a:r>
+            <a:r>
+              <a:rPr sz="900" b="0" dirty="0">
+                <a:solidFill>
+                  <a:srgbClr val="7A7A7A"/>
+                </a:solidFill>
+                <a:latin typeface="Calibri"/>
+              </a:rPr>
+              <a:t> ignition classifier - database_xgb.csv (4 449 clean rows)</a:t>
             </a:r>
           </a:p>
         </p:txBody>
@@ -4777,7 +4823,7 @@
           <a:noFill/>
         </p:spPr>
         <p:txBody>
-          <a:bodyPr wrap="square" lIns="0" rIns="0" tIns="0" bIns="0" anchor="t">
+          <a:bodyPr wrap="square" lIns="0" tIns="0" rIns="0" bIns="0" anchor="t">
             <a:spAutoFit/>
           </a:bodyPr>
           <a:lstStyle/>
@@ -4804,7 +4850,7 @@
 </file>
 
 <file path=ppt/slides/slide4.xml><?xml version="1.0" encoding="utf-8"?>
-<p:sld xmlns:a="http://schemas.openxmlformats.org/drawingml/2006/main" xmlns:p="http://schemas.openxmlformats.org/presentationml/2006/main" xmlns:r="http://schemas.openxmlformats.org/officeDocument/2006/relationships">
+<p:sld xmlns:a="http://schemas.openxmlformats.org/drawingml/2006/main" xmlns:r="http://schemas.openxmlformats.org/officeDocument/2006/relationships" xmlns:p="http://schemas.openxmlformats.org/presentationml/2006/main">
   <p:cSld>
     <p:spTree>
       <p:nvGrpSpPr>
@@ -4812,7 +4858,14 @@
         <p:cNvGrpSpPr/>
         <p:nvPr/>
       </p:nvGrpSpPr>
-      <p:grpSpPr/>
+      <p:grpSpPr>
+        <a:xfrm>
+          <a:off x="0" y="0"/>
+          <a:ext cx="0" cy="0"/>
+          <a:chOff x="0" y="0"/>
+          <a:chExt cx="0" cy="0"/>
+        </a:xfrm>
+      </p:grpSpPr>
       <p:sp>
         <p:nvSpPr>
           <p:cNvPr id="2" name="Rectangle 1"/>
@@ -4854,6 +4907,7 @@
           <a:lstStyle/>
           <a:p>
             <a:pPr algn="ctr"/>
+            <a:endParaRPr/>
           </a:p>
         </p:txBody>
       </p:sp>
@@ -4898,6 +4952,7 @@
           <a:lstStyle/>
           <a:p>
             <a:pPr algn="ctr"/>
+            <a:endParaRPr/>
           </a:p>
         </p:txBody>
       </p:sp>
@@ -4918,7 +4973,7 @@
           <a:noFill/>
         </p:spPr>
         <p:txBody>
-          <a:bodyPr wrap="square" lIns="0" rIns="0" tIns="0" bIns="0" anchor="t">
+          <a:bodyPr wrap="square" lIns="0" tIns="0" rIns="0" bIns="0" anchor="t">
             <a:spAutoFit/>
           </a:bodyPr>
           <a:lstStyle/>
@@ -4953,7 +5008,7 @@
           <a:noFill/>
         </p:spPr>
         <p:txBody>
-          <a:bodyPr wrap="square" lIns="0" rIns="0" tIns="0" bIns="0" anchor="t">
+          <a:bodyPr wrap="square" lIns="0" tIns="0" rIns="0" bIns="0" anchor="t">
             <a:spAutoFit/>
           </a:bodyPr>
           <a:lstStyle/>
@@ -5012,7 +5067,7 @@
           <a:noFill/>
         </p:spPr>
         <p:txBody>
-          <a:bodyPr wrap="square" lIns="0" rIns="0" tIns="0" bIns="0" anchor="t">
+          <a:bodyPr wrap="square" lIns="0" tIns="0" rIns="0" bIns="0" anchor="t">
             <a:spAutoFit/>
           </a:bodyPr>
           <a:lstStyle/>
@@ -5047,7 +5102,7 @@
           <a:noFill/>
         </p:spPr>
         <p:txBody>
-          <a:bodyPr wrap="square" lIns="0" rIns="0" tIns="0" bIns="0" anchor="t">
+          <a:bodyPr wrap="square" lIns="0" tIns="0" rIns="0" bIns="0" anchor="t">
             <a:spAutoFit/>
           </a:bodyPr>
           <a:lstStyle/>
@@ -5058,7 +5113,7 @@
               </a:spcAft>
             </a:pPr>
             <a:r>
-              <a:rPr sz="1100">
+              <a:rPr sz="1100" dirty="0">
                 <a:solidFill>
                   <a:srgbClr val="1F1F1F"/>
                 </a:solidFill>
@@ -5074,7 +5129,7 @@
               </a:spcAft>
             </a:pPr>
             <a:r>
-              <a:rPr sz="1100">
+              <a:rPr sz="1100" dirty="0">
                 <a:solidFill>
                   <a:srgbClr val="1F1F1F"/>
                 </a:solidFill>
@@ -5090,7 +5145,7 @@
               </a:spcAft>
             </a:pPr>
             <a:r>
-              <a:rPr sz="1100">
+              <a:rPr sz="1100" dirty="0">
                 <a:solidFill>
                   <a:srgbClr val="1F1F1F"/>
                 </a:solidFill>
@@ -5106,7 +5161,7 @@
               </a:spcAft>
             </a:pPr>
             <a:r>
-              <a:rPr sz="1100">
+              <a:rPr sz="1100" dirty="0">
                 <a:solidFill>
                   <a:srgbClr val="1F1F1F"/>
                 </a:solidFill>
@@ -5122,23 +5177,41 @@
               </a:spcAft>
             </a:pPr>
             <a:r>
-              <a:rPr sz="1100">
-                <a:solidFill>
-                  <a:srgbClr val="1F1F1F"/>
-                </a:solidFill>
-                <a:latin typeface="Calibri"/>
-              </a:rPr>
-              <a:t>* Bias caused by scale_pos_weight: the</a:t>
-            </a:r>
-          </a:p>
-          <a:p>
-            <a:pPr algn="l">
-              <a:spcAft>
-                <a:spcPts val="400"/>
-              </a:spcAft>
-            </a:pPr>
-            <a:r>
-              <a:rPr sz="1100">
+              <a:rPr sz="1100" dirty="0">
+                <a:solidFill>
+                  <a:srgbClr val="1F1F1F"/>
+                </a:solidFill>
+                <a:latin typeface="Calibri"/>
+              </a:rPr>
+              <a:t>* Bias caused by </a:t>
+            </a:r>
+            <a:r>
+              <a:rPr sz="1100" dirty="0" err="1">
+                <a:solidFill>
+                  <a:srgbClr val="1F1F1F"/>
+                </a:solidFill>
+                <a:latin typeface="Calibri"/>
+              </a:rPr>
+              <a:t>scale_pos_weight</a:t>
+            </a:r>
+            <a:r>
+              <a:rPr sz="1100" dirty="0">
+                <a:solidFill>
+                  <a:srgbClr val="1F1F1F"/>
+                </a:solidFill>
+                <a:latin typeface="Calibri"/>
+              </a:rPr>
+              <a:t>: the</a:t>
+            </a:r>
+          </a:p>
+          <a:p>
+            <a:pPr algn="l">
+              <a:spcAft>
+                <a:spcPts val="400"/>
+              </a:spcAft>
+            </a:pPr>
+            <a:r>
+              <a:rPr sz="1100" dirty="0">
                 <a:solidFill>
                   <a:srgbClr val="1F1F1F"/>
                 </a:solidFill>
@@ -5154,7 +5227,7 @@
               </a:spcAft>
             </a:pPr>
             <a:r>
-              <a:rPr sz="1100">
+              <a:rPr sz="1100" dirty="0">
                 <a:solidFill>
                   <a:srgbClr val="1F1F1F"/>
                 </a:solidFill>
@@ -5169,24 +5242,21 @@
                 <a:spcPts val="400"/>
               </a:spcAft>
             </a:pPr>
-            <a:r>
-              <a:rPr sz="1100">
-                <a:solidFill>
-                  <a:srgbClr val="1F1F1F"/>
-                </a:solidFill>
-                <a:latin typeface="Calibri"/>
-              </a:rPr>
-              <a:t/>
-            </a:r>
-          </a:p>
-          <a:p>
-            <a:pPr algn="l">
-              <a:spcAft>
-                <a:spcPts val="400"/>
-              </a:spcAft>
-            </a:pPr>
-            <a:r>
-              <a:rPr sz="1100">
+            <a:endParaRPr sz="1100" dirty="0">
+              <a:solidFill>
+                <a:srgbClr val="1F1F1F"/>
+              </a:solidFill>
+              <a:latin typeface="Calibri"/>
+            </a:endParaRPr>
+          </a:p>
+          <a:p>
+            <a:pPr algn="l">
+              <a:spcAft>
+                <a:spcPts val="400"/>
+              </a:spcAft>
+            </a:pPr>
+            <a:r>
+              <a:rPr sz="1100" dirty="0">
                 <a:solidFill>
                   <a:srgbClr val="1F1F1F"/>
                 </a:solidFill>
@@ -5202,7 +5272,7 @@
               </a:spcAft>
             </a:pPr>
             <a:r>
-              <a:rPr sz="1100">
+              <a:rPr sz="1100" dirty="0">
                 <a:solidFill>
                   <a:srgbClr val="1F1F1F"/>
                 </a:solidFill>
@@ -5218,7 +5288,7 @@
               </a:spcAft>
             </a:pPr>
             <a:r>
-              <a:rPr sz="1100">
+              <a:rPr sz="1100" dirty="0">
                 <a:solidFill>
                   <a:srgbClr val="1F1F1F"/>
                 </a:solidFill>
@@ -5234,7 +5304,7 @@
               </a:spcAft>
             </a:pPr>
             <a:r>
-              <a:rPr sz="1100">
+              <a:rPr sz="1100" dirty="0">
                 <a:solidFill>
                   <a:srgbClr val="1F1F1F"/>
                 </a:solidFill>
@@ -5249,24 +5319,21 @@
                 <a:spcPts val="400"/>
               </a:spcAft>
             </a:pPr>
-            <a:r>
-              <a:rPr sz="1100">
-                <a:solidFill>
-                  <a:srgbClr val="1F1F1F"/>
-                </a:solidFill>
-                <a:latin typeface="Calibri"/>
-              </a:rPr>
-              <a:t/>
-            </a:r>
-          </a:p>
-          <a:p>
-            <a:pPr algn="l">
-              <a:spcAft>
-                <a:spcPts val="400"/>
-              </a:spcAft>
-            </a:pPr>
-            <a:r>
-              <a:rPr sz="1100">
+            <a:endParaRPr sz="1100" dirty="0">
+              <a:solidFill>
+                <a:srgbClr val="1F1F1F"/>
+              </a:solidFill>
+              <a:latin typeface="Calibri"/>
+            </a:endParaRPr>
+          </a:p>
+          <a:p>
+            <a:pPr algn="l">
+              <a:spcAft>
+                <a:spcPts val="400"/>
+              </a:spcAft>
+            </a:pPr>
+            <a:r>
+              <a:rPr sz="1100" dirty="0">
                 <a:solidFill>
                   <a:srgbClr val="1F1F1F"/>
                 </a:solidFill>
@@ -5282,7 +5349,7 @@
               </a:spcAft>
             </a:pPr>
             <a:r>
-              <a:rPr sz="1100">
+              <a:rPr sz="1100" dirty="0">
                 <a:solidFill>
                   <a:srgbClr val="1F1F1F"/>
                 </a:solidFill>
@@ -5298,7 +5365,7 @@
               </a:spcAft>
             </a:pPr>
             <a:r>
-              <a:rPr sz="1100">
+              <a:rPr sz="1100" dirty="0">
                 <a:solidFill>
                   <a:srgbClr val="1F1F1F"/>
                 </a:solidFill>
@@ -5314,7 +5381,7 @@
               </a:spcAft>
             </a:pPr>
             <a:r>
-              <a:rPr sz="1100">
+              <a:rPr sz="1100" dirty="0">
                 <a:solidFill>
                   <a:srgbClr val="1F1F1F"/>
                 </a:solidFill>
@@ -5330,7 +5397,7 @@
               </a:spcAft>
             </a:pPr>
             <a:r>
-              <a:rPr sz="1100">
+              <a:rPr sz="1100" dirty="0">
                 <a:solidFill>
                   <a:srgbClr val="1F1F1F"/>
                 </a:solidFill>
@@ -5346,23 +5413,41 @@
               </a:spcAft>
             </a:pPr>
             <a:r>
-              <a:rPr sz="1100">
-                <a:solidFill>
-                  <a:srgbClr val="1F1F1F"/>
-                </a:solidFill>
-                <a:latin typeface="Calibri"/>
-              </a:rPr>
-              <a:t>  threshold to maximise precision on the</a:t>
-            </a:r>
-          </a:p>
-          <a:p>
-            <a:pPr algn="l">
-              <a:spcAft>
-                <a:spcPts val="400"/>
-              </a:spcAft>
-            </a:pPr>
-            <a:r>
-              <a:rPr sz="1100">
+              <a:rPr sz="1100" dirty="0">
+                <a:solidFill>
+                  <a:srgbClr val="1F1F1F"/>
+                </a:solidFill>
+                <a:latin typeface="Calibri"/>
+              </a:rPr>
+              <a:t>  threshold to </a:t>
+            </a:r>
+            <a:r>
+              <a:rPr sz="1100" dirty="0" err="1">
+                <a:solidFill>
+                  <a:srgbClr val="1F1F1F"/>
+                </a:solidFill>
+                <a:latin typeface="Calibri"/>
+              </a:rPr>
+              <a:t>maximise</a:t>
+            </a:r>
+            <a:r>
+              <a:rPr sz="1100" dirty="0">
+                <a:solidFill>
+                  <a:srgbClr val="1F1F1F"/>
+                </a:solidFill>
+                <a:latin typeface="Calibri"/>
+              </a:rPr>
+              <a:t> precision on the</a:t>
+            </a:r>
+          </a:p>
+          <a:p>
+            <a:pPr algn="l">
+              <a:spcAft>
+                <a:spcPts val="400"/>
+              </a:spcAft>
+            </a:pPr>
+            <a:r>
+              <a:rPr sz="1100" dirty="0">
                 <a:solidFill>
                   <a:srgbClr val="1F1F1F"/>
                 </a:solidFill>
@@ -5390,20 +5475,29 @@
           <a:noFill/>
         </p:spPr>
         <p:txBody>
-          <a:bodyPr wrap="square" lIns="0" rIns="0" tIns="0" bIns="0" anchor="t">
+          <a:bodyPr wrap="square" lIns="0" tIns="0" rIns="0" bIns="0" anchor="t">
             <a:spAutoFit/>
           </a:bodyPr>
           <a:lstStyle/>
           <a:p>
             <a:pPr algn="l"/>
             <a:r>
-              <a:rPr sz="900" b="0">
+              <a:rPr sz="900" b="0" dirty="0" err="1">
                 <a:solidFill>
                   <a:srgbClr val="7A7A7A"/>
                 </a:solidFill>
                 <a:latin typeface="Calibri"/>
               </a:rPr>
-              <a:t>XGBoost ignition classifier - database_xgb.csv (4 449 clean rows)</a:t>
+              <a:t>XGBoost</a:t>
+            </a:r>
+            <a:r>
+              <a:rPr sz="900" b="0" dirty="0">
+                <a:solidFill>
+                  <a:srgbClr val="7A7A7A"/>
+                </a:solidFill>
+                <a:latin typeface="Calibri"/>
+              </a:rPr>
+              <a:t> ignition classifier - database_xgb.csv (4 449 clean rows)</a:t>
             </a:r>
           </a:p>
         </p:txBody>
@@ -5425,7 +5519,7 @@
           <a:noFill/>
         </p:spPr>
         <p:txBody>
-          <a:bodyPr wrap="square" lIns="0" rIns="0" tIns="0" bIns="0" anchor="t">
+          <a:bodyPr wrap="square" lIns="0" tIns="0" rIns="0" bIns="0" anchor="t">
             <a:spAutoFit/>
           </a:bodyPr>
           <a:lstStyle/>
@@ -5452,7 +5546,7 @@
 </file>
 
 <file path=ppt/slides/slide5.xml><?xml version="1.0" encoding="utf-8"?>
-<p:sld xmlns:a="http://schemas.openxmlformats.org/drawingml/2006/main" xmlns:p="http://schemas.openxmlformats.org/presentationml/2006/main" xmlns:r="http://schemas.openxmlformats.org/officeDocument/2006/relationships">
+<p:sld xmlns:a="http://schemas.openxmlformats.org/drawingml/2006/main" xmlns:r="http://schemas.openxmlformats.org/officeDocument/2006/relationships" xmlns:p="http://schemas.openxmlformats.org/presentationml/2006/main">
   <p:cSld>
     <p:spTree>
       <p:nvGrpSpPr>
@@ -5460,7 +5554,14 @@
         <p:cNvGrpSpPr/>
         <p:nvPr/>
       </p:nvGrpSpPr>
-      <p:grpSpPr/>
+      <p:grpSpPr>
+        <a:xfrm>
+          <a:off x="0" y="0"/>
+          <a:ext cx="0" cy="0"/>
+          <a:chOff x="0" y="0"/>
+          <a:chExt cx="0" cy="0"/>
+        </a:xfrm>
+      </p:grpSpPr>
       <p:sp>
         <p:nvSpPr>
           <p:cNvPr id="2" name="Rectangle 1"/>
@@ -5502,6 +5603,7 @@
           <a:lstStyle/>
           <a:p>
             <a:pPr algn="ctr"/>
+            <a:endParaRPr/>
           </a:p>
         </p:txBody>
       </p:sp>
@@ -5546,6 +5648,7 @@
           <a:lstStyle/>
           <a:p>
             <a:pPr algn="ctr"/>
+            <a:endParaRPr/>
           </a:p>
         </p:txBody>
       </p:sp>
@@ -5566,7 +5669,7 @@
           <a:noFill/>
         </p:spPr>
         <p:txBody>
-          <a:bodyPr wrap="square" lIns="0" rIns="0" tIns="0" bIns="0" anchor="t">
+          <a:bodyPr wrap="square" lIns="0" tIns="0" rIns="0" bIns="0" anchor="t">
             <a:spAutoFit/>
           </a:bodyPr>
           <a:lstStyle/>
@@ -5601,7 +5704,7 @@
           <a:noFill/>
         </p:spPr>
         <p:txBody>
-          <a:bodyPr wrap="square" lIns="0" rIns="0" tIns="0" bIns="0" anchor="t">
+          <a:bodyPr wrap="square" lIns="0" tIns="0" rIns="0" bIns="0" anchor="t">
             <a:spAutoFit/>
           </a:bodyPr>
           <a:lstStyle/>
@@ -5660,7 +5763,7 @@
           <a:noFill/>
         </p:spPr>
         <p:txBody>
-          <a:bodyPr wrap="square" lIns="0" rIns="0" tIns="0" bIns="0" anchor="t">
+          <a:bodyPr wrap="square" lIns="0" tIns="0" rIns="0" bIns="0" anchor="t">
             <a:spAutoFit/>
           </a:bodyPr>
           <a:lstStyle/>
@@ -5695,7 +5798,7 @@
           <a:noFill/>
         </p:spPr>
         <p:txBody>
-          <a:bodyPr wrap="square" lIns="0" rIns="0" tIns="0" bIns="0" anchor="t">
+          <a:bodyPr wrap="square" lIns="0" tIns="0" rIns="0" bIns="0" anchor="t">
             <a:spAutoFit/>
           </a:bodyPr>
           <a:lstStyle/>
@@ -5706,7 +5809,7 @@
               </a:spcAft>
             </a:pPr>
             <a:r>
-              <a:rPr sz="1100">
+              <a:rPr sz="1100" dirty="0">
                 <a:solidFill>
                   <a:srgbClr val="1F1F1F"/>
                 </a:solidFill>
@@ -5722,7 +5825,7 @@
               </a:spcAft>
             </a:pPr>
             <a:r>
-              <a:rPr sz="1100">
+              <a:rPr sz="1100" dirty="0">
                 <a:solidFill>
                   <a:srgbClr val="1F1F1F"/>
                 </a:solidFill>
@@ -5738,7 +5841,7 @@
               </a:spcAft>
             </a:pPr>
             <a:r>
-              <a:rPr sz="1100">
+              <a:rPr sz="1100" dirty="0">
                 <a:solidFill>
                   <a:srgbClr val="1F1F1F"/>
                 </a:solidFill>
@@ -5754,7 +5857,7 @@
               </a:spcAft>
             </a:pPr>
             <a:r>
-              <a:rPr sz="1100">
+              <a:rPr sz="1100" dirty="0">
                 <a:solidFill>
                   <a:srgbClr val="1F1F1F"/>
                 </a:solidFill>
@@ -5770,7 +5873,7 @@
               </a:spcAft>
             </a:pPr>
             <a:r>
-              <a:rPr sz="1100">
+              <a:rPr sz="1100" dirty="0">
                 <a:solidFill>
                   <a:srgbClr val="1F1F1F"/>
                 </a:solidFill>
@@ -5786,7 +5889,7 @@
               </a:spcAft>
             </a:pPr>
             <a:r>
-              <a:rPr sz="1100">
+              <a:rPr sz="1100" dirty="0">
                 <a:solidFill>
                   <a:srgbClr val="1F1F1F"/>
                 </a:solidFill>
@@ -5802,23 +5905,41 @@
               </a:spcAft>
             </a:pPr>
             <a:r>
-              <a:rPr sz="1100">
-                <a:solidFill>
-                  <a:srgbClr val="1F1F1F"/>
-                </a:solidFill>
-                <a:latin typeface="Calibri"/>
-              </a:rPr>
-              <a:t>  memorisation of campaign-specific</a:t>
-            </a:r>
-          </a:p>
-          <a:p>
-            <a:pPr algn="l">
-              <a:spcAft>
-                <a:spcPts val="400"/>
-              </a:spcAft>
-            </a:pPr>
-            <a:r>
-              <a:rPr sz="1100">
+              <a:rPr sz="1100" dirty="0">
+                <a:solidFill>
+                  <a:srgbClr val="1F1F1F"/>
+                </a:solidFill>
+                <a:latin typeface="Calibri"/>
+              </a:rPr>
+              <a:t>  </a:t>
+            </a:r>
+            <a:r>
+              <a:rPr sz="1100" dirty="0" err="1">
+                <a:solidFill>
+                  <a:srgbClr val="1F1F1F"/>
+                </a:solidFill>
+                <a:latin typeface="Calibri"/>
+              </a:rPr>
+              <a:t>memorisation</a:t>
+            </a:r>
+            <a:r>
+              <a:rPr sz="1100" dirty="0">
+                <a:solidFill>
+                  <a:srgbClr val="1F1F1F"/>
+                </a:solidFill>
+                <a:latin typeface="Calibri"/>
+              </a:rPr>
+              <a:t> of campaign-specific</a:t>
+            </a:r>
+          </a:p>
+          <a:p>
+            <a:pPr algn="l">
+              <a:spcAft>
+                <a:spcPts val="400"/>
+              </a:spcAft>
+            </a:pPr>
+            <a:r>
+              <a:rPr sz="1100" dirty="0">
                 <a:solidFill>
                   <a:srgbClr val="1F1F1F"/>
                 </a:solidFill>
@@ -5833,24 +5954,21 @@
                 <a:spcPts val="400"/>
               </a:spcAft>
             </a:pPr>
-            <a:r>
-              <a:rPr sz="1100">
-                <a:solidFill>
-                  <a:srgbClr val="1F1F1F"/>
-                </a:solidFill>
-                <a:latin typeface="Calibri"/>
-              </a:rPr>
-              <a:t/>
-            </a:r>
-          </a:p>
-          <a:p>
-            <a:pPr algn="l">
-              <a:spcAft>
-                <a:spcPts val="400"/>
-              </a:spcAft>
-            </a:pPr>
-            <a:r>
-              <a:rPr sz="1100">
+            <a:endParaRPr sz="1100" dirty="0">
+              <a:solidFill>
+                <a:srgbClr val="1F1F1F"/>
+              </a:solidFill>
+              <a:latin typeface="Calibri"/>
+            </a:endParaRPr>
+          </a:p>
+          <a:p>
+            <a:pPr algn="l">
+              <a:spcAft>
+                <a:spcPts val="400"/>
+              </a:spcAft>
+            </a:pPr>
+            <a:r>
+              <a:rPr sz="1100" dirty="0">
                 <a:solidFill>
                   <a:srgbClr val="1F1F1F"/>
                 </a:solidFill>
@@ -5866,7 +5984,7 @@
               </a:spcAft>
             </a:pPr>
             <a:r>
-              <a:rPr sz="1100">
+              <a:rPr sz="1100" dirty="0">
                 <a:solidFill>
                   <a:srgbClr val="1F1F1F"/>
                 </a:solidFill>
@@ -5882,23 +6000,41 @@
               </a:spcAft>
             </a:pPr>
             <a:r>
-              <a:rPr sz="1100">
-                <a:solidFill>
-                  <a:srgbClr val="1F1F1F"/>
-                </a:solidFill>
-                <a:latin typeface="Calibri"/>
-              </a:rPr>
-              <a:t>  PMMA, PDMS, Kapton, NiCr/ETFE wire</a:t>
-            </a:r>
-          </a:p>
-          <a:p>
-            <a:pPr algn="l">
-              <a:spcAft>
-                <a:spcPts val="400"/>
-              </a:spcAft>
-            </a:pPr>
-            <a:r>
-              <a:rPr sz="1100">
+              <a:rPr sz="1100" dirty="0">
+                <a:solidFill>
+                  <a:srgbClr val="1F1F1F"/>
+                </a:solidFill>
+                <a:latin typeface="Calibri"/>
+              </a:rPr>
+              <a:t>  PMMA, PDMS, Kapton, </a:t>
+            </a:r>
+            <a:r>
+              <a:rPr sz="1100" dirty="0" err="1">
+                <a:solidFill>
+                  <a:srgbClr val="1F1F1F"/>
+                </a:solidFill>
+                <a:latin typeface="Calibri"/>
+              </a:rPr>
+              <a:t>NiCr</a:t>
+            </a:r>
+            <a:r>
+              <a:rPr sz="1100" dirty="0">
+                <a:solidFill>
+                  <a:srgbClr val="1F1F1F"/>
+                </a:solidFill>
+                <a:latin typeface="Calibri"/>
+              </a:rPr>
+              <a:t>/ETFE wire</a:t>
+            </a:r>
+          </a:p>
+          <a:p>
+            <a:pPr algn="l">
+              <a:spcAft>
+                <a:spcPts val="400"/>
+              </a:spcAft>
+            </a:pPr>
+            <a:r>
+              <a:rPr sz="1100" dirty="0">
                 <a:solidFill>
                   <a:srgbClr val="1F1F1F"/>
                 </a:solidFill>
@@ -5914,7 +6050,7 @@
               </a:spcAft>
             </a:pPr>
             <a:r>
-              <a:rPr sz="1100">
+              <a:rPr sz="1100" dirty="0">
                 <a:solidFill>
                   <a:srgbClr val="1F1F1F"/>
                 </a:solidFill>
@@ -5930,7 +6066,7 @@
               </a:spcAft>
             </a:pPr>
             <a:r>
-              <a:rPr sz="1100">
+              <a:rPr sz="1100" dirty="0">
                 <a:solidFill>
                   <a:srgbClr val="1F1F1F"/>
                 </a:solidFill>
@@ -5946,39 +6082,93 @@
               </a:spcAft>
             </a:pPr>
             <a:r>
-              <a:rPr sz="1100">
-                <a:solidFill>
-                  <a:srgbClr val="1F1F1F"/>
-                </a:solidFill>
-                <a:latin typeface="Calibri"/>
-              </a:rPr>
-              <a:t>* outer_diameter_mm, sample_dim_mean_mm,</a:t>
-            </a:r>
-          </a:p>
-          <a:p>
-            <a:pPr algn="l">
-              <a:spcAft>
-                <a:spcPts val="400"/>
-              </a:spcAft>
-            </a:pPr>
-            <a:r>
-              <a:rPr sz="1100">
-                <a:solidFill>
-                  <a:srgbClr val="1F1F1F"/>
-                </a:solidFill>
-                <a:latin typeface="Calibri"/>
-              </a:rPr>
-              <a:t>  ignition_time_s - all are first-order</a:t>
-            </a:r>
-          </a:p>
-          <a:p>
-            <a:pPr algn="l">
-              <a:spcAft>
-                <a:spcPts val="400"/>
-              </a:spcAft>
-            </a:pPr>
-            <a:r>
-              <a:rPr sz="1100">
+              <a:rPr sz="1100" dirty="0">
+                <a:solidFill>
+                  <a:srgbClr val="1F1F1F"/>
+                </a:solidFill>
+                <a:latin typeface="Calibri"/>
+              </a:rPr>
+              <a:t>* </a:t>
+            </a:r>
+            <a:r>
+              <a:rPr sz="1100" dirty="0" err="1">
+                <a:solidFill>
+                  <a:srgbClr val="1F1F1F"/>
+                </a:solidFill>
+                <a:latin typeface="Calibri"/>
+              </a:rPr>
+              <a:t>outer_diameter_mm</a:t>
+            </a:r>
+            <a:r>
+              <a:rPr sz="1100" dirty="0">
+                <a:solidFill>
+                  <a:srgbClr val="1F1F1F"/>
+                </a:solidFill>
+                <a:latin typeface="Calibri"/>
+              </a:rPr>
+              <a:t>, </a:t>
+            </a:r>
+            <a:r>
+              <a:rPr sz="1100" dirty="0" err="1">
+                <a:solidFill>
+                  <a:srgbClr val="1F1F1F"/>
+                </a:solidFill>
+                <a:latin typeface="Calibri"/>
+              </a:rPr>
+              <a:t>sample_dim_mean_mm</a:t>
+            </a:r>
+            <a:r>
+              <a:rPr sz="1100" dirty="0">
+                <a:solidFill>
+                  <a:srgbClr val="1F1F1F"/>
+                </a:solidFill>
+                <a:latin typeface="Calibri"/>
+              </a:rPr>
+              <a:t>,</a:t>
+            </a:r>
+          </a:p>
+          <a:p>
+            <a:pPr algn="l">
+              <a:spcAft>
+                <a:spcPts val="400"/>
+              </a:spcAft>
+            </a:pPr>
+            <a:r>
+              <a:rPr sz="1100" dirty="0">
+                <a:solidFill>
+                  <a:srgbClr val="1F1F1F"/>
+                </a:solidFill>
+                <a:latin typeface="Calibri"/>
+              </a:rPr>
+              <a:t>  </a:t>
+            </a:r>
+            <a:r>
+              <a:rPr sz="1100" dirty="0" err="1">
+                <a:solidFill>
+                  <a:srgbClr val="1F1F1F"/>
+                </a:solidFill>
+                <a:latin typeface="Calibri"/>
+              </a:rPr>
+              <a:t>ignition_time_s</a:t>
+            </a:r>
+            <a:r>
+              <a:rPr sz="1100" dirty="0">
+                <a:solidFill>
+                  <a:srgbClr val="1F1F1F"/>
+                </a:solidFill>
+                <a:latin typeface="Calibri"/>
+              </a:rPr>
+              <a:t> - all are first-order</a:t>
+            </a:r>
+          </a:p>
+          <a:p>
+            <a:pPr algn="l">
+              <a:spcAft>
+                <a:spcPts val="400"/>
+              </a:spcAft>
+            </a:pPr>
+            <a:r>
+              <a:rPr sz="1100" dirty="0">
                 <a:solidFill>
                   <a:srgbClr val="1F1F1F"/>
                 </a:solidFill>
@@ -5994,23 +6184,41 @@
               </a:spcAft>
             </a:pPr>
             <a:r>
-              <a:rPr sz="1100">
-                <a:solidFill>
-                  <a:srgbClr val="1F1F1F"/>
-                </a:solidFill>
-                <a:latin typeface="Calibri"/>
-              </a:rPr>
-              <a:t>* flow_direction = Quiescent captures the</a:t>
-            </a:r>
-          </a:p>
-          <a:p>
-            <a:pPr algn="l">
-              <a:spcAft>
-                <a:spcPts val="400"/>
-              </a:spcAft>
-            </a:pPr>
-            <a:r>
-              <a:rPr sz="1100">
+              <a:rPr sz="1100" dirty="0">
+                <a:solidFill>
+                  <a:srgbClr val="1F1F1F"/>
+                </a:solidFill>
+                <a:latin typeface="Calibri"/>
+              </a:rPr>
+              <a:t>* </a:t>
+            </a:r>
+            <a:r>
+              <a:rPr sz="1100" dirty="0" err="1">
+                <a:solidFill>
+                  <a:srgbClr val="1F1F1F"/>
+                </a:solidFill>
+                <a:latin typeface="Calibri"/>
+              </a:rPr>
+              <a:t>flow_direction</a:t>
+            </a:r>
+            <a:r>
+              <a:rPr sz="1100" dirty="0">
+                <a:solidFill>
+                  <a:srgbClr val="1F1F1F"/>
+                </a:solidFill>
+                <a:latin typeface="Calibri"/>
+              </a:rPr>
+              <a:t> = Quiescent captures the</a:t>
+            </a:r>
+          </a:p>
+          <a:p>
+            <a:pPr algn="l">
+              <a:spcAft>
+                <a:spcPts val="400"/>
+              </a:spcAft>
+            </a:pPr>
+            <a:r>
+              <a:rPr sz="1100" dirty="0">
                 <a:solidFill>
                   <a:srgbClr val="1F1F1F"/>
                 </a:solidFill>
@@ -6026,7 +6234,7 @@
               </a:spcAft>
             </a:pPr>
             <a:r>
-              <a:rPr sz="1100">
+              <a:rPr sz="1100" dirty="0">
                 <a:solidFill>
                   <a:srgbClr val="1F1F1F"/>
                 </a:solidFill>
@@ -6054,7 +6262,7 @@
           <a:noFill/>
         </p:spPr>
         <p:txBody>
-          <a:bodyPr wrap="square" lIns="0" rIns="0" tIns="0" bIns="0" anchor="t">
+          <a:bodyPr wrap="square" lIns="0" tIns="0" rIns="0" bIns="0" anchor="t">
             <a:spAutoFit/>
           </a:bodyPr>
           <a:lstStyle/>
@@ -6089,7 +6297,7 @@
           <a:noFill/>
         </p:spPr>
         <p:txBody>
-          <a:bodyPr wrap="square" lIns="0" rIns="0" tIns="0" bIns="0" anchor="t">
+          <a:bodyPr wrap="square" lIns="0" tIns="0" rIns="0" bIns="0" anchor="t">
             <a:spAutoFit/>
           </a:bodyPr>
           <a:lstStyle/>
@@ -6116,7 +6324,7 @@
 </file>
 
 <file path=ppt/slides/slide6.xml><?xml version="1.0" encoding="utf-8"?>
-<p:sld xmlns:a="http://schemas.openxmlformats.org/drawingml/2006/main" xmlns:p="http://schemas.openxmlformats.org/presentationml/2006/main" xmlns:r="http://schemas.openxmlformats.org/officeDocument/2006/relationships">
+<p:sld xmlns:a="http://schemas.openxmlformats.org/drawingml/2006/main" xmlns:r="http://schemas.openxmlformats.org/officeDocument/2006/relationships" xmlns:p="http://schemas.openxmlformats.org/presentationml/2006/main">
   <p:cSld>
     <p:spTree>
       <p:nvGrpSpPr>
@@ -6124,7 +6332,14 @@
         <p:cNvGrpSpPr/>
         <p:nvPr/>
       </p:nvGrpSpPr>
-      <p:grpSpPr/>
+      <p:grpSpPr>
+        <a:xfrm>
+          <a:off x="0" y="0"/>
+          <a:ext cx="0" cy="0"/>
+          <a:chOff x="0" y="0"/>
+          <a:chExt cx="0" cy="0"/>
+        </a:xfrm>
+      </p:grpSpPr>
       <p:sp>
         <p:nvSpPr>
           <p:cNvPr id="2" name="Rectangle 1"/>
@@ -6166,6 +6381,7 @@
           <a:lstStyle/>
           <a:p>
             <a:pPr algn="ctr"/>
+            <a:endParaRPr/>
           </a:p>
         </p:txBody>
       </p:sp>
@@ -6210,6 +6426,7 @@
           <a:lstStyle/>
           <a:p>
             <a:pPr algn="ctr"/>
+            <a:endParaRPr/>
           </a:p>
         </p:txBody>
       </p:sp>
@@ -6230,7 +6447,7 @@
           <a:noFill/>
         </p:spPr>
         <p:txBody>
-          <a:bodyPr wrap="square" lIns="0" rIns="0" tIns="0" bIns="0" anchor="t">
+          <a:bodyPr wrap="square" lIns="0" tIns="0" rIns="0" bIns="0" anchor="t">
             <a:spAutoFit/>
           </a:bodyPr>
           <a:lstStyle/>
@@ -6265,7 +6482,7 @@
           <a:noFill/>
         </p:spPr>
         <p:txBody>
-          <a:bodyPr wrap="square" lIns="0" rIns="0" tIns="0" bIns="0" anchor="t">
+          <a:bodyPr wrap="square" lIns="0" tIns="0" rIns="0" bIns="0" anchor="t">
             <a:spAutoFit/>
           </a:bodyPr>
           <a:lstStyle/>
@@ -6324,7 +6541,7 @@
           <a:noFill/>
         </p:spPr>
         <p:txBody>
-          <a:bodyPr wrap="square" lIns="0" rIns="0" tIns="0" bIns="0" anchor="t">
+          <a:bodyPr wrap="square" lIns="0" tIns="0" rIns="0" bIns="0" anchor="t">
             <a:spAutoFit/>
           </a:bodyPr>
           <a:lstStyle/>
@@ -6359,7 +6576,7 @@
           <a:noFill/>
         </p:spPr>
         <p:txBody>
-          <a:bodyPr wrap="square" lIns="0" rIns="0" tIns="0" bIns="0" anchor="t">
+          <a:bodyPr wrap="square" lIns="0" tIns="0" rIns="0" bIns="0" anchor="t">
             <a:spAutoFit/>
           </a:bodyPr>
           <a:lstStyle/>
@@ -6545,6 +6762,19 @@
                 <a:spcPts val="400"/>
               </a:spcAft>
             </a:pPr>
+            <a:endParaRPr sz="1100">
+              <a:solidFill>
+                <a:srgbClr val="1F1F1F"/>
+              </a:solidFill>
+              <a:latin typeface="Calibri"/>
+            </a:endParaRPr>
+          </a:p>
+          <a:p>
+            <a:pPr algn="l">
+              <a:spcAft>
+                <a:spcPts val="400"/>
+              </a:spcAft>
+            </a:pPr>
             <a:r>
               <a:rPr sz="1100">
                 <a:solidFill>
@@ -6552,7 +6782,7 @@
                 </a:solidFill>
                 <a:latin typeface="Calibri"/>
               </a:rPr>
-              <a:t/>
+              <a:t>What to quote</a:t>
             </a:r>
           </a:p>
           <a:p>
@@ -6568,7 +6798,7 @@
                 </a:solidFill>
                 <a:latin typeface="Calibri"/>
               </a:rPr>
-              <a:t>What to quote</a:t>
+              <a:t>* For a NEW row from a KNOWN rig: 0.90</a:t>
             </a:r>
           </a:p>
           <a:p>
@@ -6584,7 +6814,7 @@
                 </a:solidFill>
                 <a:latin typeface="Calibri"/>
               </a:rPr>
-              <a:t>* For a NEW row from a KNOWN rig: 0.90</a:t>
+              <a:t>  ROC-AUC is realistic.</a:t>
             </a:r>
           </a:p>
           <a:p>
@@ -6600,7 +6830,7 @@
                 </a:solidFill>
                 <a:latin typeface="Calibri"/>
               </a:rPr>
-              <a:t>  ROC-AUC is realistic.</a:t>
+              <a:t>* For a NEW rig / NEW campaign: 0.68 +/-</a:t>
             </a:r>
           </a:p>
           <a:p>
@@ -6616,22 +6846,6 @@
                 </a:solidFill>
                 <a:latin typeface="Calibri"/>
               </a:rPr>
-              <a:t>* For a NEW rig / NEW campaign: 0.68 +/-</a:t>
-            </a:r>
-          </a:p>
-          <a:p>
-            <a:pPr algn="l">
-              <a:spcAft>
-                <a:spcPts val="400"/>
-              </a:spcAft>
-            </a:pPr>
-            <a:r>
-              <a:rPr sz="1100">
-                <a:solidFill>
-                  <a:srgbClr val="1F1F1F"/>
-                </a:solidFill>
-                <a:latin typeface="Calibri"/>
-              </a:rPr>
               <a:t>  0.10 ROC-AUC is the honest expectation.</a:t>
             </a:r>
           </a:p>
@@ -6641,15 +6855,12 @@
                 <a:spcPts val="400"/>
               </a:spcAft>
             </a:pPr>
-            <a:r>
-              <a:rPr sz="1100">
-                <a:solidFill>
-                  <a:srgbClr val="1F1F1F"/>
-                </a:solidFill>
-                <a:latin typeface="Calibri"/>
-              </a:rPr>
-              <a:t/>
-            </a:r>
+            <a:endParaRPr sz="1100">
+              <a:solidFill>
+                <a:srgbClr val="1F1F1F"/>
+              </a:solidFill>
+              <a:latin typeface="Calibri"/>
+            </a:endParaRPr>
           </a:p>
           <a:p>
             <a:pPr algn="l">
@@ -6750,7 +6961,7 @@
           <a:noFill/>
         </p:spPr>
         <p:txBody>
-          <a:bodyPr wrap="square" lIns="0" rIns="0" tIns="0" bIns="0" anchor="t">
+          <a:bodyPr wrap="square" lIns="0" tIns="0" rIns="0" bIns="0" anchor="t">
             <a:spAutoFit/>
           </a:bodyPr>
           <a:lstStyle/>
@@ -6785,7 +6996,7 @@
           <a:noFill/>
         </p:spPr>
         <p:txBody>
-          <a:bodyPr wrap="square" lIns="0" rIns="0" tIns="0" bIns="0" anchor="t">
+          <a:bodyPr wrap="square" lIns="0" tIns="0" rIns="0" bIns="0" anchor="t">
             <a:spAutoFit/>
           </a:bodyPr>
           <a:lstStyle/>
